--- a/prompt_engineering/pe-0-application.pptx
+++ b/prompt_engineering/pe-0-application.pptx
@@ -5,16 +5,18 @@
     <p:sldMasterId id="2147483648" r:id="rId1"/>
   </p:sldMasterIdLst>
   <p:handoutMasterIdLst>
-    <p:handoutMasterId r:id="rId9"/>
+    <p:handoutMasterId r:id="rId11"/>
   </p:handoutMasterIdLst>
   <p:sldIdLst>
     <p:sldId id="257" r:id="rId2"/>
     <p:sldId id="290" r:id="rId3"/>
-    <p:sldId id="291" r:id="rId4"/>
-    <p:sldId id="286" r:id="rId5"/>
-    <p:sldId id="287" r:id="rId6"/>
-    <p:sldId id="289" r:id="rId7"/>
-    <p:sldId id="288" r:id="rId8"/>
+    <p:sldId id="293" r:id="rId4"/>
+    <p:sldId id="292" r:id="rId5"/>
+    <p:sldId id="291" r:id="rId6"/>
+    <p:sldId id="286" r:id="rId7"/>
+    <p:sldId id="287" r:id="rId8"/>
+    <p:sldId id="289" r:id="rId9"/>
+    <p:sldId id="288" r:id="rId10"/>
   </p:sldIdLst>
   <p:sldSz cx="12192000" cy="6858000"/>
   <p:notesSz cx="6858000" cy="9144000"/>
@@ -218,7 +220,7 @@
           <a:p>
             <a:fld id="{7BAEECA8-D063-486F-AE31-5020270C1449}" type="datetimeFigureOut">
               <a:rPr lang="en-US" smtClean="0"/>
-              <a:t>7/2/2026</a:t>
+              <a:t>8/7/2026</a:t>
             </a:fld>
             <a:endParaRPr lang="en-US"/>
           </a:p>
@@ -544,7 +546,7 @@
           <a:p>
             <a:fld id="{6383FAE1-13DE-4511-8C1B-C8AFB720664C}" type="datetimeFigureOut">
               <a:rPr lang="en-US" smtClean="0"/>
-              <a:t>7/2/2026</a:t>
+              <a:t>8/7/2026</a:t>
             </a:fld>
             <a:endParaRPr lang="en-US"/>
           </a:p>
@@ -742,7 +744,7 @@
           <a:p>
             <a:fld id="{6383FAE1-13DE-4511-8C1B-C8AFB720664C}" type="datetimeFigureOut">
               <a:rPr lang="en-US" smtClean="0"/>
-              <a:t>7/2/2026</a:t>
+              <a:t>8/7/2026</a:t>
             </a:fld>
             <a:endParaRPr lang="en-US"/>
           </a:p>
@@ -950,7 +952,7 @@
           <a:p>
             <a:fld id="{6383FAE1-13DE-4511-8C1B-C8AFB720664C}" type="datetimeFigureOut">
               <a:rPr lang="en-US" smtClean="0"/>
-              <a:t>7/2/2026</a:t>
+              <a:t>8/7/2026</a:t>
             </a:fld>
             <a:endParaRPr lang="en-US"/>
           </a:p>
@@ -1148,7 +1150,7 @@
           <a:p>
             <a:fld id="{6383FAE1-13DE-4511-8C1B-C8AFB720664C}" type="datetimeFigureOut">
               <a:rPr lang="en-US" smtClean="0"/>
-              <a:t>7/2/2026</a:t>
+              <a:t>8/7/2026</a:t>
             </a:fld>
             <a:endParaRPr lang="en-US"/>
           </a:p>
@@ -1423,7 +1425,7 @@
           <a:p>
             <a:fld id="{6383FAE1-13DE-4511-8C1B-C8AFB720664C}" type="datetimeFigureOut">
               <a:rPr lang="en-US" smtClean="0"/>
-              <a:t>7/2/2026</a:t>
+              <a:t>8/7/2026</a:t>
             </a:fld>
             <a:endParaRPr lang="en-US"/>
           </a:p>
@@ -1688,7 +1690,7 @@
           <a:p>
             <a:fld id="{6383FAE1-13DE-4511-8C1B-C8AFB720664C}" type="datetimeFigureOut">
               <a:rPr lang="en-US" smtClean="0"/>
-              <a:t>7/2/2026</a:t>
+              <a:t>8/7/2026</a:t>
             </a:fld>
             <a:endParaRPr lang="en-US"/>
           </a:p>
@@ -2100,7 +2102,7 @@
           <a:p>
             <a:fld id="{6383FAE1-13DE-4511-8C1B-C8AFB720664C}" type="datetimeFigureOut">
               <a:rPr lang="en-US" smtClean="0"/>
-              <a:t>7/2/2026</a:t>
+              <a:t>8/7/2026</a:t>
             </a:fld>
             <a:endParaRPr lang="en-US"/>
           </a:p>
@@ -2241,7 +2243,7 @@
           <a:p>
             <a:fld id="{6383FAE1-13DE-4511-8C1B-C8AFB720664C}" type="datetimeFigureOut">
               <a:rPr lang="en-US" smtClean="0"/>
-              <a:t>7/2/2026</a:t>
+              <a:t>8/7/2026</a:t>
             </a:fld>
             <a:endParaRPr lang="en-US"/>
           </a:p>
@@ -2354,7 +2356,7 @@
           <a:p>
             <a:fld id="{6383FAE1-13DE-4511-8C1B-C8AFB720664C}" type="datetimeFigureOut">
               <a:rPr lang="en-US" smtClean="0"/>
-              <a:t>7/2/2026</a:t>
+              <a:t>8/7/2026</a:t>
             </a:fld>
             <a:endParaRPr lang="en-US"/>
           </a:p>
@@ -2665,7 +2667,7 @@
           <a:p>
             <a:fld id="{6383FAE1-13DE-4511-8C1B-C8AFB720664C}" type="datetimeFigureOut">
               <a:rPr lang="en-US" smtClean="0"/>
-              <a:t>7/2/2026</a:t>
+              <a:t>8/7/2026</a:t>
             </a:fld>
             <a:endParaRPr lang="en-US"/>
           </a:p>
@@ -2956,7 +2958,7 @@
           <a:p>
             <a:fld id="{6383FAE1-13DE-4511-8C1B-C8AFB720664C}" type="datetimeFigureOut">
               <a:rPr lang="en-US" smtClean="0"/>
-              <a:t>7/2/2026</a:t>
+              <a:t>8/7/2026</a:t>
             </a:fld>
             <a:endParaRPr lang="en-US"/>
           </a:p>
@@ -3200,7 +3202,7 @@
           <a:p>
             <a:fld id="{6383FAE1-13DE-4511-8C1B-C8AFB720664C}" type="datetimeFigureOut">
               <a:rPr lang="en-US" smtClean="0"/>
-              <a:t>7/2/2026</a:t>
+              <a:t>8/7/2026</a:t>
             </a:fld>
             <a:endParaRPr lang="en-US"/>
           </a:p>
@@ -3860,8 +3862,8 @@
         </p:nvSpPr>
         <p:spPr>
           <a:xfrm>
-            <a:off x="155448" y="664798"/>
-            <a:ext cx="11430000" cy="5909310"/>
+            <a:off x="155448" y="2018110"/>
+            <a:ext cx="11430000" cy="1938992"/>
           </a:xfrm>
           <a:prstGeom prst="rect">
             <a:avLst/>
@@ -3875,7 +3877,7 @@
           <a:lstStyle/>
           <a:p>
             <a:r>
-              <a:rPr lang="en-US" dirty="0">
+              <a:rPr lang="en-US" sz="2400" dirty="0">
                 <a:solidFill>
                   <a:schemeClr val="accent6">
                     <a:lumMod val="60000"/>
@@ -3883,22 +3885,15 @@
                   </a:schemeClr>
                 </a:solidFill>
               </a:rPr>
-              <a:t>Role: You are a Senior Python Developer and Data Engineer specializing in writing high-performance, production-grade data pipelines. You write exceptionally clean, memory-efficient code and prioritize robust error handling over quick hacks.</a:t>
-            </a:r>
-          </a:p>
-          <a:p>
-            <a:endParaRPr lang="en-US" dirty="0">
-              <a:solidFill>
-                <a:schemeClr val="accent6">
-                  <a:lumMod val="60000"/>
-                  <a:lumOff val="40000"/>
-                </a:schemeClr>
-              </a:solidFill>
-            </a:endParaRPr>
-          </a:p>
-          <a:p>
-            <a:r>
-              <a:rPr lang="en-US" dirty="0">
+              <a:t>3 Simple rules of good generic prompt:</a:t>
+            </a:r>
+          </a:p>
+          <a:p>
+            <a:pPr marL="457200" indent="-457200">
+              <a:buAutoNum type="arabicParenR"/>
+            </a:pPr>
+            <a:r>
+              <a:rPr lang="en-US" sz="2400" b="1" dirty="0">
                 <a:solidFill>
                   <a:schemeClr val="accent6">
                     <a:lumMod val="60000"/>
@@ -3906,22 +3901,10 @@
                   </a:schemeClr>
                 </a:solidFill>
               </a:rPr>
-              <a:t>Task: Write an optimized Python function to calculate the variance of a specific column in a CSV file. </a:t>
-            </a:r>
-          </a:p>
-          <a:p>
-            <a:endParaRPr lang="en-US" dirty="0">
-              <a:solidFill>
-                <a:schemeClr val="accent6">
-                  <a:lumMod val="60000"/>
-                  <a:lumOff val="40000"/>
-                </a:schemeClr>
-              </a:solidFill>
-            </a:endParaRPr>
-          </a:p>
-          <a:p>
-            <a:r>
-              <a:rPr lang="en-US" dirty="0">
+              <a:t>INSTRUCTIONS: </a:t>
+            </a:r>
+            <a:r>
+              <a:rPr lang="en-US" sz="2400" dirty="0">
                 <a:solidFill>
                   <a:schemeClr val="accent6">
                     <a:lumMod val="60000"/>
@@ -3929,12 +3912,15 @@
                   </a:schemeClr>
                 </a:solidFill>
               </a:rPr>
-              <a:t>The function must meet the following requirements:</a:t>
-            </a:r>
-          </a:p>
-          <a:p>
-            <a:r>
-              <a:rPr lang="en-US" dirty="0">
+              <a:t>Define the task and action you want AI to take</a:t>
+            </a:r>
+          </a:p>
+          <a:p>
+            <a:pPr marL="457200" indent="-457200">
+              <a:buAutoNum type="arabicParenR"/>
+            </a:pPr>
+            <a:r>
+              <a:rPr lang="en-US" sz="2400" b="1" dirty="0">
                 <a:solidFill>
                   <a:schemeClr val="accent6">
                     <a:lumMod val="60000"/>
@@ -3942,10 +3928,10 @@
                   </a:schemeClr>
                 </a:solidFill>
               </a:rPr>
-              <a:t>1. Input Parameters: Accept `filename`, `delimiter`, and `</a:t>
-            </a:r>
-            <a:r>
-              <a:rPr lang="en-US" dirty="0" err="1">
+              <a:t>CONTEXT: </a:t>
+            </a:r>
+            <a:r>
+              <a:rPr lang="en-US" sz="2400" dirty="0">
                 <a:solidFill>
                   <a:schemeClr val="accent6">
                     <a:lumMod val="60000"/>
@@ -3953,10 +3939,15 @@
                   </a:schemeClr>
                 </a:solidFill>
               </a:rPr>
-              <a:t>column_name</a:t>
-            </a:r>
-            <a:r>
-              <a:rPr lang="en-US" dirty="0">
+              <a:t>Setting the stage with your role, objectives, background, anything AI should know that's relevant to your task</a:t>
+            </a:r>
+          </a:p>
+          <a:p>
+            <a:pPr marL="457200" indent="-457200">
+              <a:buAutoNum type="arabicParenR"/>
+            </a:pPr>
+            <a:r>
+              <a:rPr lang="en-US" sz="2400" b="1" dirty="0">
                 <a:solidFill>
                   <a:schemeClr val="accent6">
                     <a:lumMod val="60000"/>
@@ -3964,12 +3955,10 @@
                   </a:schemeClr>
                 </a:solidFill>
               </a:rPr>
-              <a:t>`.</a:t>
-            </a:r>
-          </a:p>
-          <a:p>
-            <a:r>
-              <a:rPr lang="en-US" dirty="0">
+              <a:t>CONSTRAINTS:</a:t>
+            </a:r>
+            <a:r>
+              <a:rPr lang="en-US" sz="2400" dirty="0">
                 <a:solidFill>
                   <a:schemeClr val="accent6">
                     <a:lumMod val="60000"/>
@@ -3977,184 +3966,7 @@
                   </a:schemeClr>
                 </a:solidFill>
               </a:rPr>
-              <a:t>2. Functionality: Read the CSV file (default delimiter is a semi-colon ';') and compute the mathematical variance of the specified column (e.g., 'age').</a:t>
-            </a:r>
-          </a:p>
-          <a:p>
-            <a:r>
-              <a:rPr lang="en-US" dirty="0">
-                <a:solidFill>
-                  <a:schemeClr val="accent6">
-                    <a:lumMod val="60000"/>
-                    <a:lumOff val="40000"/>
-                  </a:schemeClr>
-                </a:solidFill>
-              </a:rPr>
-              <a:t>3. Optimization: Optimize for memory efficiency and speed, handling potentially large files without loading the entire dataset into memory at once (e.g., using Welford's algorithm for online variance or streaming via the built-in `csv` module). </a:t>
-            </a:r>
-          </a:p>
-          <a:p>
-            <a:r>
-              <a:rPr lang="en-US" dirty="0">
-                <a:solidFill>
-                  <a:schemeClr val="accent6">
-                    <a:lumMod val="60000"/>
-                    <a:lumOff val="40000"/>
-                  </a:schemeClr>
-                </a:solidFill>
-              </a:rPr>
-              <a:t>4. Robust Error Handling: Include try-except blocks to gracefully handle:</a:t>
-            </a:r>
-          </a:p>
-          <a:p>
-            <a:r>
-              <a:rPr lang="en-US" dirty="0">
-                <a:solidFill>
-                  <a:schemeClr val="accent6">
-                    <a:lumMod val="60000"/>
-                    <a:lumOff val="40000"/>
-                  </a:schemeClr>
-                </a:solidFill>
-              </a:rPr>
-              <a:t>   - </a:t>
-            </a:r>
-            <a:r>
-              <a:rPr lang="en-US" dirty="0" err="1">
-                <a:solidFill>
-                  <a:schemeClr val="accent6">
-                    <a:lumMod val="60000"/>
-                    <a:lumOff val="40000"/>
-                  </a:schemeClr>
-                </a:solidFill>
-              </a:rPr>
-              <a:t>FileNotFoundError</a:t>
-            </a:r>
-            <a:endParaRPr lang="en-US" dirty="0">
-              <a:solidFill>
-                <a:schemeClr val="accent6">
-                  <a:lumMod val="60000"/>
-                  <a:lumOff val="40000"/>
-                </a:schemeClr>
-              </a:solidFill>
-            </a:endParaRPr>
-          </a:p>
-          <a:p>
-            <a:r>
-              <a:rPr lang="en-US" dirty="0">
-                <a:solidFill>
-                  <a:schemeClr val="accent6">
-                    <a:lumMod val="60000"/>
-                    <a:lumOff val="40000"/>
-                  </a:schemeClr>
-                </a:solidFill>
-              </a:rPr>
-              <a:t>   - </a:t>
-            </a:r>
-            <a:r>
-              <a:rPr lang="en-US" dirty="0" err="1">
-                <a:solidFill>
-                  <a:schemeClr val="accent6">
-                    <a:lumMod val="60000"/>
-                    <a:lumOff val="40000"/>
-                  </a:schemeClr>
-                </a:solidFill>
-              </a:rPr>
-              <a:t>KeyError</a:t>
-            </a:r>
-            <a:r>
-              <a:rPr lang="en-US" dirty="0">
-                <a:solidFill>
-                  <a:schemeClr val="accent6">
-                    <a:lumMod val="60000"/>
-                    <a:lumOff val="40000"/>
-                  </a:schemeClr>
-                </a:solidFill>
-              </a:rPr>
-              <a:t> (if the column name does not exist)</a:t>
-            </a:r>
-          </a:p>
-          <a:p>
-            <a:r>
-              <a:rPr lang="en-US" dirty="0">
-                <a:solidFill>
-                  <a:schemeClr val="accent6">
-                    <a:lumMod val="60000"/>
-                    <a:lumOff val="40000"/>
-                  </a:schemeClr>
-                </a:solidFill>
-              </a:rPr>
-              <a:t>   - </a:t>
-            </a:r>
-            <a:r>
-              <a:rPr lang="en-US" dirty="0" err="1">
-                <a:solidFill>
-                  <a:schemeClr val="accent6">
-                    <a:lumMod val="60000"/>
-                    <a:lumOff val="40000"/>
-                  </a:schemeClr>
-                </a:solidFill>
-              </a:rPr>
-              <a:t>ValueError</a:t>
-            </a:r>
-            <a:r>
-              <a:rPr lang="en-US" dirty="0">
-                <a:solidFill>
-                  <a:schemeClr val="accent6">
-                    <a:lumMod val="60000"/>
-                    <a:lumOff val="40000"/>
-                  </a:schemeClr>
-                </a:solidFill>
-              </a:rPr>
-              <a:t> (if the column contains non-numeric data or has fewer than two valid data points)</a:t>
-            </a:r>
-          </a:p>
-          <a:p>
-            <a:r>
-              <a:rPr lang="en-US" dirty="0">
-                <a:solidFill>
-                  <a:schemeClr val="accent6">
-                    <a:lumMod val="60000"/>
-                    <a:lumOff val="40000"/>
-                  </a:schemeClr>
-                </a:solidFill>
-              </a:rPr>
-              <a:t>   - Empty files</a:t>
-            </a:r>
-          </a:p>
-          <a:p>
-            <a:r>
-              <a:rPr lang="en-US" dirty="0">
-                <a:solidFill>
-                  <a:schemeClr val="accent6">
-                    <a:lumMod val="60000"/>
-                    <a:lumOff val="40000"/>
-                  </a:schemeClr>
-                </a:solidFill>
-              </a:rPr>
-              <a:t>5. Output: Return the calculated variance as a float.</a:t>
-            </a:r>
-          </a:p>
-          <a:p>
-            <a:endParaRPr lang="en-US" dirty="0">
-              <a:solidFill>
-                <a:schemeClr val="accent6">
-                  <a:lumMod val="60000"/>
-                  <a:lumOff val="40000"/>
-                </a:schemeClr>
-              </a:solidFill>
-            </a:endParaRPr>
-          </a:p>
-          <a:p>
-            <a:r>
-              <a:rPr lang="en-US" dirty="0">
-                <a:solidFill>
-                  <a:schemeClr val="accent6">
-                    <a:lumMod val="60000"/>
-                    <a:lumOff val="40000"/>
-                  </a:schemeClr>
-                </a:solidFill>
-              </a:rPr>
-              <a:t>Include clean code comments and a brief production-ready usage example.</a:t>
+              <a:t> Specify any rules, style, tone, length, output format</a:t>
             </a:r>
           </a:p>
         </p:txBody>
@@ -4173,6 +3985,583 @@
 </file>
 
 <file path=ppt/slides/slide3.xml><?xml version="1.0" encoding="utf-8"?>
+<p:sld xmlns:a="http://schemas.openxmlformats.org/drawingml/2006/main" xmlns:r="http://schemas.openxmlformats.org/officeDocument/2006/relationships" xmlns:p="http://schemas.openxmlformats.org/presentationml/2006/main">
+  <p:cSld>
+    <p:spTree>
+      <p:nvGrpSpPr>
+        <p:cNvPr id="1" name="">
+          <a:extLst>
+            <a:ext uri="{FF2B5EF4-FFF2-40B4-BE49-F238E27FC236}">
+              <a16:creationId xmlns:a16="http://schemas.microsoft.com/office/drawing/2014/main" id="{A127EDCE-F32A-DB2E-7AB1-C22E0BC43FC7}"/>
+            </a:ext>
+          </a:extLst>
+        </p:cNvPr>
+        <p:cNvGrpSpPr/>
+        <p:nvPr/>
+      </p:nvGrpSpPr>
+      <p:grpSpPr>
+        <a:xfrm>
+          <a:off x="0" y="0"/>
+          <a:ext cx="0" cy="0"/>
+          <a:chOff x="0" y="0"/>
+          <a:chExt cx="0" cy="0"/>
+        </a:xfrm>
+      </p:grpSpPr>
+      <p:sp>
+        <p:nvSpPr>
+          <p:cNvPr id="4" name="TextBox 3">
+            <a:extLst>
+              <a:ext uri="{FF2B5EF4-FFF2-40B4-BE49-F238E27FC236}">
+                <a16:creationId xmlns:a16="http://schemas.microsoft.com/office/drawing/2014/main" id="{76B4568B-34E5-1011-69E3-F6C8E17BE2C8}"/>
+              </a:ext>
+            </a:extLst>
+          </p:cNvPr>
+          <p:cNvSpPr txBox="1"/>
+          <p:nvPr/>
+        </p:nvSpPr>
+        <p:spPr>
+          <a:xfrm>
+            <a:off x="155448" y="664798"/>
+            <a:ext cx="11430000" cy="830997"/>
+          </a:xfrm>
+          <a:prstGeom prst="rect">
+            <a:avLst/>
+          </a:prstGeom>
+          <a:noFill/>
+        </p:spPr>
+        <p:txBody>
+          <a:bodyPr wrap="square">
+            <a:spAutoFit/>
+          </a:bodyPr>
+          <a:lstStyle/>
+          <a:p>
+            <a:pPr algn="ctr"/>
+            <a:r>
+              <a:rPr lang="en-US" sz="2400" b="1" dirty="0">
+                <a:solidFill>
+                  <a:schemeClr val="accent6">
+                    <a:lumMod val="60000"/>
+                    <a:lumOff val="40000"/>
+                  </a:schemeClr>
+                </a:solidFill>
+              </a:rPr>
+              <a:t>EXAMPLE of BAD Prompt: </a:t>
+            </a:r>
+          </a:p>
+          <a:p>
+            <a:r>
+              <a:rPr lang="en-US" sz="2400" dirty="0">
+                <a:solidFill>
+                  <a:schemeClr val="accent6">
+                    <a:lumMod val="60000"/>
+                    <a:lumOff val="40000"/>
+                  </a:schemeClr>
+                </a:solidFill>
+              </a:rPr>
+              <a:t>Recommend 5 ways to implement AI in  my marketing Agency</a:t>
+            </a:r>
+          </a:p>
+        </p:txBody>
+      </p:sp>
+      <p:sp>
+        <p:nvSpPr>
+          <p:cNvPr id="3" name="TextBox 2">
+            <a:extLst>
+              <a:ext uri="{FF2B5EF4-FFF2-40B4-BE49-F238E27FC236}">
+                <a16:creationId xmlns:a16="http://schemas.microsoft.com/office/drawing/2014/main" id="{E9DB78DD-FD24-C4D6-8854-3B0EC7CC46AE}"/>
+              </a:ext>
+            </a:extLst>
+          </p:cNvPr>
+          <p:cNvSpPr txBox="1"/>
+          <p:nvPr/>
+        </p:nvSpPr>
+        <p:spPr>
+          <a:xfrm>
+            <a:off x="155448" y="2340632"/>
+            <a:ext cx="11338560" cy="4154984"/>
+          </a:xfrm>
+          <a:prstGeom prst="rect">
+            <a:avLst/>
+          </a:prstGeom>
+          <a:noFill/>
+        </p:spPr>
+        <p:txBody>
+          <a:bodyPr wrap="square">
+            <a:spAutoFit/>
+          </a:bodyPr>
+          <a:lstStyle/>
+          <a:p>
+            <a:pPr marL="0" marR="0" algn="ctr">
+              <a:buNone/>
+            </a:pPr>
+            <a:r>
+              <a:rPr lang="en-US" sz="2400" b="1" u="none" strike="noStrike" dirty="0">
+                <a:solidFill>
+                  <a:schemeClr val="accent6">
+                    <a:lumMod val="60000"/>
+                    <a:lumOff val="40000"/>
+                  </a:schemeClr>
+                </a:solidFill>
+                <a:effectLst/>
+                <a:latin typeface="Google Sans"/>
+              </a:rPr>
+              <a:t>Good Prompt:</a:t>
+            </a:r>
+          </a:p>
+          <a:p>
+            <a:pPr marL="0" marR="0">
+              <a:buNone/>
+            </a:pPr>
+            <a:r>
+              <a:rPr lang="en-US" sz="2400" b="1" u="none" strike="noStrike" dirty="0">
+                <a:solidFill>
+                  <a:schemeClr val="accent6">
+                    <a:lumMod val="60000"/>
+                    <a:lumOff val="40000"/>
+                  </a:schemeClr>
+                </a:solidFill>
+                <a:effectLst/>
+                <a:latin typeface="Google Sans"/>
+              </a:rPr>
+              <a:t>Instruction:</a:t>
+            </a:r>
+            <a:br>
+              <a:rPr lang="en-US" sz="2400" b="0" u="none" strike="noStrike" dirty="0">
+                <a:solidFill>
+                  <a:schemeClr val="accent6">
+                    <a:lumMod val="60000"/>
+                    <a:lumOff val="40000"/>
+                  </a:schemeClr>
+                </a:solidFill>
+                <a:effectLst/>
+                <a:latin typeface="Google Sans"/>
+              </a:rPr>
+            </a:br>
+            <a:r>
+              <a:rPr lang="en-US" sz="2400" b="0" u="none" strike="noStrike" dirty="0">
+                <a:solidFill>
+                  <a:schemeClr val="accent6">
+                    <a:lumMod val="60000"/>
+                    <a:lumOff val="40000"/>
+                  </a:schemeClr>
+                </a:solidFill>
+                <a:effectLst/>
+                <a:latin typeface="Google Sans"/>
+              </a:rPr>
+              <a:t>Recommend 5 ways to implement AI in my business.</a:t>
+            </a:r>
+          </a:p>
+          <a:p>
+            <a:pPr marL="0" marR="0">
+              <a:buNone/>
+            </a:pPr>
+            <a:r>
+              <a:rPr lang="en-US" sz="2400" b="1" u="none" strike="noStrike" dirty="0">
+                <a:solidFill>
+                  <a:schemeClr val="accent6">
+                    <a:lumMod val="60000"/>
+                    <a:lumOff val="40000"/>
+                  </a:schemeClr>
+                </a:solidFill>
+                <a:effectLst/>
+                <a:latin typeface="Google Sans"/>
+              </a:rPr>
+              <a:t>Context:</a:t>
+            </a:r>
+            <a:br>
+              <a:rPr lang="en-US" sz="2400" b="0" u="none" strike="noStrike" dirty="0">
+                <a:solidFill>
+                  <a:schemeClr val="accent6">
+                    <a:lumMod val="60000"/>
+                    <a:lumOff val="40000"/>
+                  </a:schemeClr>
+                </a:solidFill>
+                <a:effectLst/>
+                <a:latin typeface="Google Sans"/>
+              </a:rPr>
+            </a:br>
+            <a:r>
+              <a:rPr lang="en-US" sz="2400" b="0" u="none" strike="noStrike" dirty="0">
+                <a:solidFill>
+                  <a:schemeClr val="accent6">
+                    <a:lumMod val="60000"/>
+                    <a:lumOff val="40000"/>
+                  </a:schemeClr>
+                </a:solidFill>
+                <a:effectLst/>
+                <a:latin typeface="Google Sans"/>
+              </a:rPr>
+              <a:t>I run a small marketing agency focused on social media and content for local businesses. I want to use AI to save time, improve client deliverables, and increase efficiency across content creation, client communication, reporting, and internal workflows.</a:t>
+            </a:r>
+          </a:p>
+          <a:p>
+            <a:pPr marL="0" marR="0">
+              <a:buNone/>
+            </a:pPr>
+            <a:r>
+              <a:rPr lang="en-US" sz="2400" b="1" u="none" strike="noStrike" dirty="0">
+                <a:solidFill>
+                  <a:schemeClr val="accent6">
+                    <a:lumMod val="60000"/>
+                    <a:lumOff val="40000"/>
+                  </a:schemeClr>
+                </a:solidFill>
+                <a:effectLst/>
+                <a:latin typeface="Google Sans"/>
+              </a:rPr>
+              <a:t>Constraints:</a:t>
+            </a:r>
+            <a:br>
+              <a:rPr lang="en-US" sz="2400" b="0" u="none" strike="noStrike" dirty="0">
+                <a:solidFill>
+                  <a:schemeClr val="accent6">
+                    <a:lumMod val="60000"/>
+                    <a:lumOff val="40000"/>
+                  </a:schemeClr>
+                </a:solidFill>
+                <a:effectLst/>
+                <a:latin typeface="Google Sans"/>
+              </a:rPr>
+            </a:br>
+            <a:r>
+              <a:rPr lang="en-US" sz="2400" b="0" u="none" strike="noStrike" dirty="0">
+                <a:solidFill>
+                  <a:schemeClr val="accent6">
+                    <a:lumMod val="60000"/>
+                    <a:lumOff val="40000"/>
+                  </a:schemeClr>
+                </a:solidFill>
+                <a:effectLst/>
+                <a:latin typeface="Google Sans"/>
+              </a:rPr>
+              <a:t>Keep recommendations low-cost, easy to implement without technical expertise, and focused on quick wins. No custom-built solutions. Format as a numbered list with a one-sentence explanation for </a:t>
+            </a:r>
+            <a:r>
+              <a:rPr lang="en-US" sz="2400" b="0" u="none" strike="noStrike">
+                <a:solidFill>
+                  <a:schemeClr val="accent6">
+                    <a:lumMod val="60000"/>
+                    <a:lumOff val="40000"/>
+                  </a:schemeClr>
+                </a:solidFill>
+                <a:effectLst/>
+                <a:latin typeface="Google Sans"/>
+              </a:rPr>
+              <a:t>each.</a:t>
+            </a:r>
+            <a:endParaRPr lang="en-US" sz="2400" b="0" u="none" strike="noStrike" dirty="0">
+              <a:solidFill>
+                <a:schemeClr val="accent6">
+                  <a:lumMod val="60000"/>
+                  <a:lumOff val="40000"/>
+                </a:schemeClr>
+              </a:solidFill>
+              <a:effectLst/>
+              <a:latin typeface="Google Sans"/>
+            </a:endParaRPr>
+          </a:p>
+        </p:txBody>
+      </p:sp>
+    </p:spTree>
+    <p:extLst>
+      <p:ext uri="{BB962C8B-B14F-4D97-AF65-F5344CB8AC3E}">
+        <p14:creationId xmlns:p14="http://schemas.microsoft.com/office/powerpoint/2010/main" val="2330563652"/>
+      </p:ext>
+    </p:extLst>
+  </p:cSld>
+  <p:clrMapOvr>
+    <a:masterClrMapping/>
+  </p:clrMapOvr>
+</p:sld>
+</file>
+
+<file path=ppt/slides/slide4.xml><?xml version="1.0" encoding="utf-8"?>
+<p:sld xmlns:a="http://schemas.openxmlformats.org/drawingml/2006/main" xmlns:r="http://schemas.openxmlformats.org/officeDocument/2006/relationships" xmlns:p="http://schemas.openxmlformats.org/presentationml/2006/main">
+  <p:cSld>
+    <p:spTree>
+      <p:nvGrpSpPr>
+        <p:cNvPr id="1" name="">
+          <a:extLst>
+            <a:ext uri="{FF2B5EF4-FFF2-40B4-BE49-F238E27FC236}">
+              <a16:creationId xmlns:a16="http://schemas.microsoft.com/office/drawing/2014/main" id="{7A823566-3BBA-965E-64B0-B70CD1BCFBAD}"/>
+            </a:ext>
+          </a:extLst>
+        </p:cNvPr>
+        <p:cNvGrpSpPr/>
+        <p:nvPr/>
+      </p:nvGrpSpPr>
+      <p:grpSpPr>
+        <a:xfrm>
+          <a:off x="0" y="0"/>
+          <a:ext cx="0" cy="0"/>
+          <a:chOff x="0" y="0"/>
+          <a:chExt cx="0" cy="0"/>
+        </a:xfrm>
+      </p:grpSpPr>
+      <p:sp>
+        <p:nvSpPr>
+          <p:cNvPr id="4" name="TextBox 3">
+            <a:extLst>
+              <a:ext uri="{FF2B5EF4-FFF2-40B4-BE49-F238E27FC236}">
+                <a16:creationId xmlns:a16="http://schemas.microsoft.com/office/drawing/2014/main" id="{BAB35047-27EB-8146-3339-8BE81D66E691}"/>
+              </a:ext>
+            </a:extLst>
+          </p:cNvPr>
+          <p:cNvSpPr txBox="1"/>
+          <p:nvPr/>
+        </p:nvSpPr>
+        <p:spPr>
+          <a:xfrm>
+            <a:off x="155448" y="664798"/>
+            <a:ext cx="11430000" cy="5632311"/>
+          </a:xfrm>
+          <a:prstGeom prst="rect">
+            <a:avLst/>
+          </a:prstGeom>
+          <a:noFill/>
+        </p:spPr>
+        <p:txBody>
+          <a:bodyPr wrap="square">
+            <a:spAutoFit/>
+          </a:bodyPr>
+          <a:lstStyle/>
+          <a:p>
+            <a:r>
+              <a:rPr lang="en-US" sz="2000" dirty="0">
+                <a:solidFill>
+                  <a:schemeClr val="accent6">
+                    <a:lumMod val="60000"/>
+                    <a:lumOff val="40000"/>
+                  </a:schemeClr>
+                </a:solidFill>
+              </a:rPr>
+              <a:t>Role: You are a Senior Python Developer and Data Engineer specializing in writing high-performance, production-grade data pipelines. You write clean, memory-efficient code and prioritize error handling.</a:t>
+            </a:r>
+          </a:p>
+          <a:p>
+            <a:endParaRPr lang="en-US" sz="2000" dirty="0">
+              <a:solidFill>
+                <a:schemeClr val="accent6">
+                  <a:lumMod val="60000"/>
+                  <a:lumOff val="40000"/>
+                </a:schemeClr>
+              </a:solidFill>
+            </a:endParaRPr>
+          </a:p>
+          <a:p>
+            <a:r>
+              <a:rPr lang="en-US" sz="2000" dirty="0">
+                <a:solidFill>
+                  <a:schemeClr val="accent6">
+                    <a:lumMod val="60000"/>
+                    <a:lumOff val="40000"/>
+                  </a:schemeClr>
+                </a:solidFill>
+              </a:rPr>
+              <a:t>Task: Write an optimized Python function to calculate the variance of a specific column in a CSV file. </a:t>
+            </a:r>
+          </a:p>
+          <a:p>
+            <a:endParaRPr lang="en-US" sz="2000" dirty="0">
+              <a:solidFill>
+                <a:schemeClr val="accent6">
+                  <a:lumMod val="60000"/>
+                  <a:lumOff val="40000"/>
+                </a:schemeClr>
+              </a:solidFill>
+            </a:endParaRPr>
+          </a:p>
+          <a:p>
+            <a:r>
+              <a:rPr lang="en-US" sz="2000" dirty="0">
+                <a:solidFill>
+                  <a:schemeClr val="accent6">
+                    <a:lumMod val="60000"/>
+                    <a:lumOff val="40000"/>
+                  </a:schemeClr>
+                </a:solidFill>
+              </a:rPr>
+              <a:t>The function must meet the following requirements:</a:t>
+            </a:r>
+          </a:p>
+          <a:p>
+            <a:r>
+              <a:rPr lang="en-US" sz="2000" dirty="0">
+                <a:solidFill>
+                  <a:schemeClr val="accent6">
+                    <a:lumMod val="60000"/>
+                    <a:lumOff val="40000"/>
+                  </a:schemeClr>
+                </a:solidFill>
+              </a:rPr>
+              <a:t>1. Input Parameters: Accept `filename`, `delimiter`, and `</a:t>
+            </a:r>
+            <a:r>
+              <a:rPr lang="en-US" sz="2000" dirty="0" err="1">
+                <a:solidFill>
+                  <a:schemeClr val="accent6">
+                    <a:lumMod val="60000"/>
+                    <a:lumOff val="40000"/>
+                  </a:schemeClr>
+                </a:solidFill>
+              </a:rPr>
+              <a:t>column_name</a:t>
+            </a:r>
+            <a:r>
+              <a:rPr lang="en-US" sz="2000" dirty="0">
+                <a:solidFill>
+                  <a:schemeClr val="accent6">
+                    <a:lumMod val="60000"/>
+                    <a:lumOff val="40000"/>
+                  </a:schemeClr>
+                </a:solidFill>
+              </a:rPr>
+              <a:t>`.</a:t>
+            </a:r>
+          </a:p>
+          <a:p>
+            <a:r>
+              <a:rPr lang="en-US" sz="2000" dirty="0">
+                <a:solidFill>
+                  <a:schemeClr val="accent6">
+                    <a:lumMod val="60000"/>
+                    <a:lumOff val="40000"/>
+                  </a:schemeClr>
+                </a:solidFill>
+              </a:rPr>
+              <a:t>2. Functionality: Read the CSV file (default delimiter is a semi-colon ';') and compute the mathematical variance of the specified column (e.g., 'age').</a:t>
+            </a:r>
+          </a:p>
+          <a:p>
+            <a:r>
+              <a:rPr lang="en-US" sz="2000" dirty="0">
+                <a:solidFill>
+                  <a:schemeClr val="accent6">
+                    <a:lumMod val="60000"/>
+                    <a:lumOff val="40000"/>
+                  </a:schemeClr>
+                </a:solidFill>
+              </a:rPr>
+              <a:t>3. Optimization: Optimize for memory efficiency and speed, handling large files</a:t>
+            </a:r>
+          </a:p>
+          <a:p>
+            <a:r>
+              <a:rPr lang="en-US" sz="2000" dirty="0">
+                <a:solidFill>
+                  <a:schemeClr val="accent6">
+                    <a:lumMod val="60000"/>
+                    <a:lumOff val="40000"/>
+                  </a:schemeClr>
+                </a:solidFill>
+              </a:rPr>
+              <a:t>4. Robust Error Handling: Include try-except blocks to gracefully handle:</a:t>
+            </a:r>
+          </a:p>
+          <a:p>
+            <a:r>
+              <a:rPr lang="en-US" sz="2000" dirty="0">
+                <a:solidFill>
+                  <a:schemeClr val="accent6">
+                    <a:lumMod val="60000"/>
+                    <a:lumOff val="40000"/>
+                  </a:schemeClr>
+                </a:solidFill>
+              </a:rPr>
+              <a:t>   - File Not Found Error</a:t>
+            </a:r>
+          </a:p>
+          <a:p>
+            <a:r>
+              <a:rPr lang="en-US" sz="2000" dirty="0">
+                <a:solidFill>
+                  <a:schemeClr val="accent6">
+                    <a:lumMod val="60000"/>
+                    <a:lumOff val="40000"/>
+                  </a:schemeClr>
+                </a:solidFill>
+              </a:rPr>
+              <a:t>   - Column name does not exist Error</a:t>
+            </a:r>
+          </a:p>
+          <a:p>
+            <a:r>
+              <a:rPr lang="en-US" sz="2000" dirty="0">
+                <a:solidFill>
+                  <a:schemeClr val="accent6">
+                    <a:lumMod val="60000"/>
+                    <a:lumOff val="40000"/>
+                  </a:schemeClr>
+                </a:solidFill>
+              </a:rPr>
+              <a:t>   - If the column contains non-numeric data</a:t>
+            </a:r>
+          </a:p>
+          <a:p>
+            <a:r>
+              <a:rPr lang="en-US" sz="2000" dirty="0">
+                <a:solidFill>
+                  <a:schemeClr val="accent6">
+                    <a:lumMod val="60000"/>
+                    <a:lumOff val="40000"/>
+                  </a:schemeClr>
+                </a:solidFill>
+              </a:rPr>
+              <a:t>   - Empty files</a:t>
+            </a:r>
+          </a:p>
+          <a:p>
+            <a:r>
+              <a:rPr lang="en-US" sz="2000" dirty="0">
+                <a:solidFill>
+                  <a:schemeClr val="accent6">
+                    <a:lumMod val="60000"/>
+                    <a:lumOff val="40000"/>
+                  </a:schemeClr>
+                </a:solidFill>
+              </a:rPr>
+              <a:t>5. Output: Return the calculated variance as a float.</a:t>
+            </a:r>
+          </a:p>
+          <a:p>
+            <a:endParaRPr lang="en-US" sz="2000" dirty="0">
+              <a:solidFill>
+                <a:schemeClr val="accent6">
+                  <a:lumMod val="60000"/>
+                  <a:lumOff val="40000"/>
+                </a:schemeClr>
+              </a:solidFill>
+            </a:endParaRPr>
+          </a:p>
+          <a:p>
+            <a:r>
+              <a:rPr lang="en-US" sz="2000" dirty="0">
+                <a:solidFill>
+                  <a:schemeClr val="accent6">
+                    <a:lumMod val="60000"/>
+                    <a:lumOff val="40000"/>
+                  </a:schemeClr>
+                </a:solidFill>
+              </a:rPr>
+              <a:t>Include usage example.</a:t>
+            </a:r>
+          </a:p>
+        </p:txBody>
+      </p:sp>
+    </p:spTree>
+    <p:extLst>
+      <p:ext uri="{BB962C8B-B14F-4D97-AF65-F5344CB8AC3E}">
+        <p14:creationId xmlns:p14="http://schemas.microsoft.com/office/powerpoint/2010/main" val="3833799210"/>
+      </p:ext>
+    </p:extLst>
+  </p:cSld>
+  <p:clrMapOvr>
+    <a:masterClrMapping/>
+  </p:clrMapOvr>
+</p:sld>
+</file>
+
+<file path=ppt/slides/slide5.xml><?xml version="1.0" encoding="utf-8"?>
 <p:sld xmlns:a="http://schemas.openxmlformats.org/drawingml/2006/main" xmlns:r="http://schemas.openxmlformats.org/officeDocument/2006/relationships" xmlns:p="http://schemas.openxmlformats.org/presentationml/2006/main">
   <p:cSld>
     <p:spTree>
@@ -4210,7 +4599,7 @@
         <p:spPr>
           <a:xfrm>
             <a:off x="182880" y="302359"/>
-            <a:ext cx="11430000" cy="6555641"/>
+            <a:ext cx="11430000" cy="6247864"/>
           </a:xfrm>
           <a:prstGeom prst="rect">
             <a:avLst/>
@@ -4245,7 +4634,7 @@
                   </a:schemeClr>
                 </a:solidFill>
               </a:rPr>
-              <a:t>You are an expert Executive Research Assistant. Your task is to help a busy CEO quickly digest a long industry report without losing critical data.</a:t>
+              <a:t>You are an Executive Research Assistant. Your task is to help a busy CEO quickly digest a long industry report </a:t>
             </a:r>
           </a:p>
           <a:p>
@@ -4391,7 +4780,7 @@
                   </a:schemeClr>
                 </a:solidFill>
               </a:rPr>
-              <a:t>Focus heavily on the "what" and the "why." Prioritize concrete metrics, financial figures, or statistical trends over general background information or historical context.</a:t>
+              <a:t>Focus heavily on the "what" and the "why." Prioritize metrics, financial figures, or statistical trends over general background information or historical context.</a:t>
             </a:r>
           </a:p>
           <a:p>
@@ -4445,7 +4834,7 @@
 </p:sld>
 </file>
 
-<file path=ppt/slides/slide4.xml><?xml version="1.0" encoding="utf-8"?>
+<file path=ppt/slides/slide6.xml><?xml version="1.0" encoding="utf-8"?>
 <p:sld xmlns:a="http://schemas.openxmlformats.org/drawingml/2006/main" xmlns:r="http://schemas.openxmlformats.org/officeDocument/2006/relationships" xmlns:p="http://schemas.openxmlformats.org/presentationml/2006/main">
   <p:cSld>
     <p:spTree>
@@ -4677,7 +5066,7 @@
 </p:sld>
 </file>
 
-<file path=ppt/slides/slide5.xml><?xml version="1.0" encoding="utf-8"?>
+<file path=ppt/slides/slide7.xml><?xml version="1.0" encoding="utf-8"?>
 <p:sld xmlns:a="http://schemas.openxmlformats.org/drawingml/2006/main" xmlns:r="http://schemas.openxmlformats.org/officeDocument/2006/relationships" xmlns:p="http://schemas.openxmlformats.org/presentationml/2006/main">
   <p:cSld>
     <p:spTree>
@@ -4794,7 +5183,7 @@
 </p:sld>
 </file>
 
-<file path=ppt/slides/slide6.xml><?xml version="1.0" encoding="utf-8"?>
+<file path=ppt/slides/slide8.xml><?xml version="1.0" encoding="utf-8"?>
 <p:sld xmlns:a="http://schemas.openxmlformats.org/drawingml/2006/main" xmlns:r="http://schemas.openxmlformats.org/officeDocument/2006/relationships" xmlns:p="http://schemas.openxmlformats.org/presentationml/2006/main">
   <p:cSld>
     <p:spTree>
@@ -4890,7 +5279,7 @@
 </p:sld>
 </file>
 
-<file path=ppt/slides/slide7.xml><?xml version="1.0" encoding="utf-8"?>
+<file path=ppt/slides/slide9.xml><?xml version="1.0" encoding="utf-8"?>
 <p:sld xmlns:a="http://schemas.openxmlformats.org/drawingml/2006/main" xmlns:r="http://schemas.openxmlformats.org/officeDocument/2006/relationships" xmlns:p="http://schemas.openxmlformats.org/presentationml/2006/main">
   <p:cSld>
     <p:spTree>

--- a/prompt_engineering/pe-0-application.pptx
+++ b/prompt_engineering/pe-0-application.pptx
@@ -220,7 +220,7 @@
           <a:p>
             <a:fld id="{7BAEECA8-D063-486F-AE31-5020270C1449}" type="datetimeFigureOut">
               <a:rPr lang="en-US" smtClean="0"/>
-              <a:t>8/7/2026</a:t>
+              <a:t>10/14/2026</a:t>
             </a:fld>
             <a:endParaRPr lang="en-US"/>
           </a:p>
@@ -546,7 +546,7 @@
           <a:p>
             <a:fld id="{6383FAE1-13DE-4511-8C1B-C8AFB720664C}" type="datetimeFigureOut">
               <a:rPr lang="en-US" smtClean="0"/>
-              <a:t>8/7/2026</a:t>
+              <a:t>10/14/2026</a:t>
             </a:fld>
             <a:endParaRPr lang="en-US"/>
           </a:p>
@@ -744,7 +744,7 @@
           <a:p>
             <a:fld id="{6383FAE1-13DE-4511-8C1B-C8AFB720664C}" type="datetimeFigureOut">
               <a:rPr lang="en-US" smtClean="0"/>
-              <a:t>8/7/2026</a:t>
+              <a:t>10/14/2026</a:t>
             </a:fld>
             <a:endParaRPr lang="en-US"/>
           </a:p>
@@ -952,7 +952,7 @@
           <a:p>
             <a:fld id="{6383FAE1-13DE-4511-8C1B-C8AFB720664C}" type="datetimeFigureOut">
               <a:rPr lang="en-US" smtClean="0"/>
-              <a:t>8/7/2026</a:t>
+              <a:t>10/14/2026</a:t>
             </a:fld>
             <a:endParaRPr lang="en-US"/>
           </a:p>
@@ -1150,7 +1150,7 @@
           <a:p>
             <a:fld id="{6383FAE1-13DE-4511-8C1B-C8AFB720664C}" type="datetimeFigureOut">
               <a:rPr lang="en-US" smtClean="0"/>
-              <a:t>8/7/2026</a:t>
+              <a:t>10/14/2026</a:t>
             </a:fld>
             <a:endParaRPr lang="en-US"/>
           </a:p>
@@ -1425,7 +1425,7 @@
           <a:p>
             <a:fld id="{6383FAE1-13DE-4511-8C1B-C8AFB720664C}" type="datetimeFigureOut">
               <a:rPr lang="en-US" smtClean="0"/>
-              <a:t>8/7/2026</a:t>
+              <a:t>10/14/2026</a:t>
             </a:fld>
             <a:endParaRPr lang="en-US"/>
           </a:p>
@@ -1690,7 +1690,7 @@
           <a:p>
             <a:fld id="{6383FAE1-13DE-4511-8C1B-C8AFB720664C}" type="datetimeFigureOut">
               <a:rPr lang="en-US" smtClean="0"/>
-              <a:t>8/7/2026</a:t>
+              <a:t>10/14/2026</a:t>
             </a:fld>
             <a:endParaRPr lang="en-US"/>
           </a:p>
@@ -2102,7 +2102,7 @@
           <a:p>
             <a:fld id="{6383FAE1-13DE-4511-8C1B-C8AFB720664C}" type="datetimeFigureOut">
               <a:rPr lang="en-US" smtClean="0"/>
-              <a:t>8/7/2026</a:t>
+              <a:t>10/14/2026</a:t>
             </a:fld>
             <a:endParaRPr lang="en-US"/>
           </a:p>
@@ -2243,7 +2243,7 @@
           <a:p>
             <a:fld id="{6383FAE1-13DE-4511-8C1B-C8AFB720664C}" type="datetimeFigureOut">
               <a:rPr lang="en-US" smtClean="0"/>
-              <a:t>8/7/2026</a:t>
+              <a:t>10/14/2026</a:t>
             </a:fld>
             <a:endParaRPr lang="en-US"/>
           </a:p>
@@ -2356,7 +2356,7 @@
           <a:p>
             <a:fld id="{6383FAE1-13DE-4511-8C1B-C8AFB720664C}" type="datetimeFigureOut">
               <a:rPr lang="en-US" smtClean="0"/>
-              <a:t>8/7/2026</a:t>
+              <a:t>10/14/2026</a:t>
             </a:fld>
             <a:endParaRPr lang="en-US"/>
           </a:p>
@@ -2667,7 +2667,7 @@
           <a:p>
             <a:fld id="{6383FAE1-13DE-4511-8C1B-C8AFB720664C}" type="datetimeFigureOut">
               <a:rPr lang="en-US" smtClean="0"/>
-              <a:t>8/7/2026</a:t>
+              <a:t>10/14/2026</a:t>
             </a:fld>
             <a:endParaRPr lang="en-US"/>
           </a:p>
@@ -2958,7 +2958,7 @@
           <a:p>
             <a:fld id="{6383FAE1-13DE-4511-8C1B-C8AFB720664C}" type="datetimeFigureOut">
               <a:rPr lang="en-US" smtClean="0"/>
-              <a:t>8/7/2026</a:t>
+              <a:t>10/14/2026</a:t>
             </a:fld>
             <a:endParaRPr lang="en-US"/>
           </a:p>
@@ -3202,7 +3202,7 @@
           <a:p>
             <a:fld id="{6383FAE1-13DE-4511-8C1B-C8AFB720664C}" type="datetimeFigureOut">
               <a:rPr lang="en-US" smtClean="0"/>
-              <a:t>8/7/2026</a:t>
+              <a:t>10/14/2026</a:t>
             </a:fld>
             <a:endParaRPr lang="en-US"/>
           </a:p>
@@ -3863,7 +3863,7 @@
         <p:spPr>
           <a:xfrm>
             <a:off x="155448" y="2018110"/>
-            <a:ext cx="11430000" cy="1938992"/>
+            <a:ext cx="11430000" cy="3046988"/>
           </a:xfrm>
           <a:prstGeom prst="rect">
             <a:avLst/>
@@ -3885,8 +3885,29 @@
                   </a:schemeClr>
                 </a:solidFill>
               </a:rPr>
-              <a:t>3 Simple rules of good generic prompt:</a:t>
-            </a:r>
+              <a:t>3 Simple rules of good generic </a:t>
+            </a:r>
+            <a:r>
+              <a:rPr lang="en-US" sz="2400">
+                <a:solidFill>
+                  <a:schemeClr val="accent6">
+                    <a:lumMod val="60000"/>
+                    <a:lumOff val="40000"/>
+                  </a:schemeClr>
+                </a:solidFill>
+              </a:rPr>
+              <a:t>prompt:</a:t>
+            </a:r>
+          </a:p>
+          <a:p>
+            <a:endParaRPr lang="en-US" sz="2400" dirty="0">
+              <a:solidFill>
+                <a:schemeClr val="accent6">
+                  <a:lumMod val="60000"/>
+                  <a:lumOff val="40000"/>
+                </a:schemeClr>
+              </a:solidFill>
+            </a:endParaRPr>
           </a:p>
           <a:p>
             <a:pPr marL="457200" indent="-457200">
@@ -3912,13 +3933,37 @@
                   </a:schemeClr>
                 </a:solidFill>
               </a:rPr>
-              <a:t>Define the task and action you want AI to take</a:t>
+              <a:t>Define the task and action you want AI </a:t>
+            </a:r>
+            <a:r>
+              <a:rPr lang="en-US" sz="2400">
+                <a:solidFill>
+                  <a:schemeClr val="accent6">
+                    <a:lumMod val="60000"/>
+                    <a:lumOff val="40000"/>
+                  </a:schemeClr>
+                </a:solidFill>
+              </a:rPr>
+              <a:t>to take</a:t>
             </a:r>
           </a:p>
           <a:p>
             <a:pPr marL="457200" indent="-457200">
               <a:buAutoNum type="arabicParenR"/>
             </a:pPr>
+            <a:endParaRPr lang="en-US" sz="2400" dirty="0">
+              <a:solidFill>
+                <a:schemeClr val="accent6">
+                  <a:lumMod val="60000"/>
+                  <a:lumOff val="40000"/>
+                </a:schemeClr>
+              </a:solidFill>
+            </a:endParaRPr>
+          </a:p>
+          <a:p>
+            <a:pPr marL="457200" indent="-457200">
+              <a:buAutoNum type="arabicParenR"/>
+            </a:pPr>
             <a:r>
               <a:rPr lang="en-US" sz="2400" b="1" dirty="0">
                 <a:solidFill>
@@ -3939,8 +3984,32 @@
                   </a:schemeClr>
                 </a:solidFill>
               </a:rPr>
-              <a:t>Setting the stage with your role, objectives, background, anything AI should know that's relevant to your task</a:t>
-            </a:r>
+              <a:t>Setting the stage with your role, objectives, background, anything AI should know that's relevant to </a:t>
+            </a:r>
+            <a:r>
+              <a:rPr lang="en-US" sz="2400">
+                <a:solidFill>
+                  <a:schemeClr val="accent6">
+                    <a:lumMod val="60000"/>
+                    <a:lumOff val="40000"/>
+                  </a:schemeClr>
+                </a:solidFill>
+              </a:rPr>
+              <a:t>your task</a:t>
+            </a:r>
+          </a:p>
+          <a:p>
+            <a:pPr marL="457200" indent="-457200">
+              <a:buAutoNum type="arabicParenR"/>
+            </a:pPr>
+            <a:endParaRPr lang="en-US" sz="2400" dirty="0">
+              <a:solidFill>
+                <a:schemeClr val="accent6">
+                  <a:lumMod val="60000"/>
+                  <a:lumOff val="40000"/>
+                </a:schemeClr>
+              </a:solidFill>
+            </a:endParaRPr>
           </a:p>
           <a:p>
             <a:pPr marL="457200" indent="-457200">
@@ -4021,7 +4090,7 @@
         </p:nvSpPr>
         <p:spPr>
           <a:xfrm>
-            <a:off x="155448" y="664798"/>
+            <a:off x="109728" y="362384"/>
             <a:ext cx="11430000" cy="830997"/>
           </a:xfrm>
           <a:prstGeom prst="rect">
@@ -4058,7 +4127,29 @@
                   </a:schemeClr>
                 </a:solidFill>
               </a:rPr>
-              <a:t>Recommend 5 ways to implement AI in  my marketing Agency</a:t>
+              <a:t>Recommend 5 ways to implement AI </a:t>
+            </a:r>
+            <a:r>
+              <a:rPr lang="en-US" sz="2400">
+                <a:solidFill>
+                  <a:schemeClr val="accent6">
+                    <a:lumMod val="60000"/>
+                    <a:lumOff val="40000"/>
+                  </a:schemeClr>
+                </a:solidFill>
+              </a:rPr>
+              <a:t>in my </a:t>
+            </a:r>
+            <a:r>
+              <a:rPr lang="en-US" sz="2400" dirty="0">
+                <a:solidFill>
+                  <a:schemeClr val="accent6">
+                    <a:lumMod val="60000"/>
+                    <a:lumOff val="40000"/>
+                  </a:schemeClr>
+                </a:solidFill>
+              </a:rPr>
+              <a:t>marketing Agency</a:t>
             </a:r>
           </a:p>
         </p:txBody>
@@ -4077,8 +4168,8 @@
         </p:nvSpPr>
         <p:spPr>
           <a:xfrm>
-            <a:off x="155448" y="2340632"/>
-            <a:ext cx="11338560" cy="4154984"/>
+            <a:off x="109728" y="1753610"/>
+            <a:ext cx="11338560" cy="4893647"/>
           </a:xfrm>
           <a:prstGeom prst="rect">
             <a:avLst/>
@@ -4148,15 +4239,10 @@
                 <a:effectLst/>
                 <a:latin typeface="Google Sans"/>
               </a:rPr>
-              <a:t>Recommend 5 ways to implement AI in my business.</a:t>
-            </a:r>
-          </a:p>
-          <a:p>
-            <a:pPr marL="0" marR="0">
-              <a:buNone/>
-            </a:pPr>
-            <a:r>
-              <a:rPr lang="en-US" sz="2400" b="1" u="none" strike="noStrike" dirty="0">
+              <a:t>Recommend 5 ways to implement AI in my </a:t>
+            </a:r>
+            <a:r>
+              <a:rPr lang="en-US" sz="2400" b="0" u="none" strike="noStrike">
                 <a:solidFill>
                   <a:schemeClr val="accent6">
                     <a:lumMod val="60000"/>
@@ -4166,6 +4252,39 @@
                 <a:effectLst/>
                 <a:latin typeface="Google Sans"/>
               </a:rPr>
+              <a:t>business.</a:t>
+            </a:r>
+          </a:p>
+          <a:p>
+            <a:pPr marL="0" marR="0">
+              <a:buNone/>
+            </a:pPr>
+            <a:endParaRPr lang="en-US" sz="2400" b="0" u="none" strike="noStrike" dirty="0">
+              <a:solidFill>
+                <a:schemeClr val="accent6">
+                  <a:lumMod val="60000"/>
+                  <a:lumOff val="40000"/>
+                </a:schemeClr>
+              </a:solidFill>
+              <a:effectLst/>
+              <a:latin typeface="Google Sans"/>
+            </a:endParaRPr>
+          </a:p>
+          <a:p>
+            <a:pPr marL="0" marR="0">
+              <a:buNone/>
+            </a:pPr>
+            <a:r>
+              <a:rPr lang="en-US" sz="2400" b="1" u="none" strike="noStrike" dirty="0">
+                <a:solidFill>
+                  <a:schemeClr val="accent6">
+                    <a:lumMod val="60000"/>
+                    <a:lumOff val="40000"/>
+                  </a:schemeClr>
+                </a:solidFill>
+                <a:effectLst/>
+                <a:latin typeface="Google Sans"/>
+              </a:rPr>
               <a:t>Context:</a:t>
             </a:r>
             <a:br>
@@ -4191,8 +4310,36 @@
                 <a:effectLst/>
                 <a:latin typeface="Google Sans"/>
               </a:rPr>
-              <a:t>I run a small marketing agency focused on social media and content for local businesses. I want to use AI to save time, improve client deliverables, and increase efficiency across content creation, client communication, reporting, and internal workflows.</a:t>
-            </a:r>
+              <a:t>I run a small marketing agency focused on social media and content for local businesses. I want to use AI to save time, improve client deliverables, and increase efficiency across content creation, client communication, reporting, and internal </a:t>
+            </a:r>
+            <a:r>
+              <a:rPr lang="en-US" sz="2400" b="0" u="none" strike="noStrike">
+                <a:solidFill>
+                  <a:schemeClr val="accent6">
+                    <a:lumMod val="60000"/>
+                    <a:lumOff val="40000"/>
+                  </a:schemeClr>
+                </a:solidFill>
+                <a:effectLst/>
+                <a:latin typeface="Google Sans"/>
+              </a:rPr>
+              <a:t>workflows.</a:t>
+            </a:r>
+          </a:p>
+          <a:p>
+            <a:pPr marL="0" marR="0">
+              <a:buNone/>
+            </a:pPr>
+            <a:endParaRPr lang="en-US" sz="2400" b="0" u="none" strike="noStrike" dirty="0">
+              <a:solidFill>
+                <a:schemeClr val="accent6">
+                  <a:lumMod val="60000"/>
+                  <a:lumOff val="40000"/>
+                </a:schemeClr>
+              </a:solidFill>
+              <a:effectLst/>
+              <a:latin typeface="Google Sans"/>
+            </a:endParaRPr>
           </a:p>
           <a:p>
             <a:pPr marL="0" marR="0">
@@ -4327,6 +4474,17 @@
           <a:lstStyle/>
           <a:p>
             <a:r>
+              <a:rPr lang="en-US" sz="2000" b="1" dirty="0">
+                <a:solidFill>
+                  <a:schemeClr val="accent6">
+                    <a:lumMod val="60000"/>
+                    <a:lumOff val="40000"/>
+                  </a:schemeClr>
+                </a:solidFill>
+              </a:rPr>
+              <a:t>Role: </a:t>
+            </a:r>
+            <a:r>
               <a:rPr lang="en-US" sz="2000" dirty="0">
                 <a:solidFill>
                   <a:schemeClr val="accent6">
@@ -4335,7 +4493,7 @@
                   </a:schemeClr>
                 </a:solidFill>
               </a:rPr>
-              <a:t>Role: You are a Senior Python Developer and Data Engineer specializing in writing high-performance, production-grade data pipelines. You write clean, memory-efficient code and prioritize error handling.</a:t>
+              <a:t>You are a Senior Python Developer and Data Engineer specializing in writing high-performance, production-grade data pipelines. You write clean, memory-efficient code and prioritize error handling.</a:t>
             </a:r>
           </a:p>
           <a:p>
@@ -4350,6 +4508,17 @@
           </a:p>
           <a:p>
             <a:r>
+              <a:rPr lang="en-US" sz="2000" b="1" dirty="0">
+                <a:solidFill>
+                  <a:schemeClr val="accent6">
+                    <a:lumMod val="60000"/>
+                    <a:lumOff val="40000"/>
+                  </a:schemeClr>
+                </a:solidFill>
+              </a:rPr>
+              <a:t>Task: </a:t>
+            </a:r>
+            <a:r>
               <a:rPr lang="en-US" sz="2000" dirty="0">
                 <a:solidFill>
                   <a:schemeClr val="accent6">
@@ -4358,7 +4527,7 @@
                   </a:schemeClr>
                 </a:solidFill>
               </a:rPr>
-              <a:t>Task: Write an optimized Python function to calculate the variance of a specific column in a CSV file. </a:t>
+              <a:t>Write an optimized Python function to calculate the variance of a specific column in a CSV file. </a:t>
             </a:r>
           </a:p>
           <a:p>
@@ -4373,6 +4542,28 @@
           </a:p>
           <a:p>
             <a:r>
+              <a:rPr lang="en-US" sz="2000" b="1">
+                <a:solidFill>
+                  <a:schemeClr val="accent6">
+                    <a:lumMod val="60000"/>
+                    <a:lumOff val="40000"/>
+                  </a:schemeClr>
+                </a:solidFill>
+              </a:rPr>
+              <a:t>Constraint: </a:t>
+            </a:r>
+            <a:r>
+              <a:rPr lang="en-US" sz="2000">
+                <a:solidFill>
+                  <a:schemeClr val="accent6">
+                    <a:lumMod val="60000"/>
+                    <a:lumOff val="40000"/>
+                  </a:schemeClr>
+                </a:solidFill>
+              </a:rPr>
+              <a:t>The </a:t>
+            </a:r>
+            <a:r>
               <a:rPr lang="en-US" sz="2000" dirty="0">
                 <a:solidFill>
                   <a:schemeClr val="accent6">
@@ -4381,7 +4572,7 @@
                   </a:schemeClr>
                 </a:solidFill>
               </a:rPr>
-              <a:t>The function must meet the following requirements:</a:t>
+              <a:t>function must meet the following requirements:</a:t>
             </a:r>
           </a:p>
           <a:p>
@@ -4901,8 +5092,8 @@
         </p:nvSpPr>
         <p:spPr>
           <a:xfrm>
-            <a:off x="1316736" y="292608"/>
-            <a:ext cx="9217010" cy="369332"/>
+            <a:off x="436202" y="237745"/>
+            <a:ext cx="12186349" cy="461665"/>
           </a:xfrm>
           <a:prstGeom prst="rect">
             <a:avLst/>
@@ -4916,7 +5107,7 @@
           <a:lstStyle/>
           <a:p>
             <a:r>
-              <a:rPr lang="en-US" dirty="0">
+              <a:rPr lang="en-US" sz="2400" dirty="0">
                 <a:solidFill>
                   <a:schemeClr val="accent6">
                     <a:lumMod val="60000"/>
@@ -4927,7 +5118,7 @@
               <a:t>Problem: I want to remove the Student and Quiz part from the RHS menu. I am using </a:t>
             </a:r>
             <a:r>
-              <a:rPr lang="en-US" dirty="0" err="1">
+              <a:rPr lang="en-US" sz="2400" dirty="0" err="1">
                 <a:solidFill>
                   <a:schemeClr val="accent6">
                     <a:lumMod val="60000"/>
@@ -4938,7 +5129,7 @@
               <a:t>wordpress</a:t>
             </a:r>
             <a:r>
-              <a:rPr lang="en-US" dirty="0">
+              <a:rPr lang="en-US" sz="2400" dirty="0">
                 <a:solidFill>
                   <a:schemeClr val="accent6">
                     <a:lumMod val="60000"/>
